--- a/results/traits_fg/glmmtmb_stable_fg_interpretation/Fig5_FG_trait_signatures_heatmap_Zscore.pptx
+++ b/results/traits_fg/glmmtmb_stable_fg_interpretation/Fig5_FG_trait_signatures_heatmap_Zscore.pptx
@@ -2216,16 +2216,16 @@
       </p:grpSpPr>
       <p:grpSp xmlns:pic="http://schemas.openxmlformats.org/drawingml/2006/picture">
         <p:nvGrpSpPr>
-          <p:cNvPr id="2" name=""/>
+          <p:cNvPr id="2" name="Content Placeholder 2"/>
           <p:cNvGrpSpPr/>
           <p:nvPr/>
         </p:nvGrpSpPr>
         <p:grpSpPr>
-          <a:xfrm rot="0">
-            <a:off x="0" y="0"/>
-            <a:ext cx="9144000" cy="6858000"/>
-            <a:chOff x="0" y="0"/>
-            <a:chExt cx="9144000" cy="6858000"/>
+          <a:xfrm>
+            <a:off x="457200" y="1600200"/>
+            <a:ext cx="8229600" cy="4525963"/>
+            <a:chOff x="457200" y="1600200"/>
+            <a:chExt cx="8229600" cy="4525963"/>
           </a:xfrm>
         </p:grpSpPr>
         <p:sp>
@@ -2236,8 +2236,8 @@
           </p:nvSpPr>
           <p:spPr>
             <a:xfrm>
-              <a:off x="0" y="0"/>
-              <a:ext cx="9144000" cy="6858000"/>
+              <a:off x="457200" y="1600200"/>
+              <a:ext cx="8229600" cy="4525962"/>
             </a:xfrm>
             <a:prstGeom prst="rect">
               <a:avLst/>
@@ -2271,8 +2271,8 @@
           </p:nvSpPr>
           <p:spPr>
             <a:xfrm>
-              <a:off x="0" y="0"/>
-              <a:ext cx="9144000" cy="6858000"/>
+              <a:off x="457200" y="1600200"/>
+              <a:ext cx="8229600" cy="4525962"/>
             </a:xfrm>
             <a:prstGeom prst="rect">
               <a:avLst/>
@@ -2306,8 +2306,8 @@
           </p:nvSpPr>
           <p:spPr>
             <a:xfrm>
-              <a:off x="413131" y="568962"/>
-              <a:ext cx="7273677" cy="6008824"/>
+              <a:off x="1221388" y="2238751"/>
+              <a:ext cx="5786801" cy="3205531"/>
             </a:xfrm>
             <a:prstGeom prst="rect">
               <a:avLst/>
@@ -2332,8 +2332,8 @@
           </p:nvSpPr>
           <p:spPr>
             <a:xfrm>
-              <a:off x="514154" y="2634495"/>
-              <a:ext cx="1010233" cy="1877757"/>
+              <a:off x="1301760" y="4342381"/>
+              <a:ext cx="803722" cy="1001728"/>
             </a:xfrm>
             <a:prstGeom prst="rect">
               <a:avLst/>
@@ -2367,8 +2367,8 @@
           </p:nvSpPr>
           <p:spPr>
             <a:xfrm>
-              <a:off x="1524387" y="2634495"/>
-              <a:ext cx="1010233" cy="1877757"/>
+              <a:off x="2105483" y="4342381"/>
+              <a:ext cx="803722" cy="1001728"/>
             </a:xfrm>
             <a:prstGeom prst="rect">
               <a:avLst/>
@@ -2402,8 +2402,8 @@
           </p:nvSpPr>
           <p:spPr>
             <a:xfrm>
-              <a:off x="2534620" y="2634495"/>
-              <a:ext cx="1010233" cy="1877757"/>
+              <a:off x="2909205" y="4342381"/>
+              <a:ext cx="803722" cy="1001728"/>
             </a:xfrm>
             <a:prstGeom prst="rect">
               <a:avLst/>
@@ -2437,8 +2437,8 @@
           </p:nvSpPr>
           <p:spPr>
             <a:xfrm>
-              <a:off x="3544853" y="2634495"/>
-              <a:ext cx="1010233" cy="1877757"/>
+              <a:off x="3712927" y="4342381"/>
+              <a:ext cx="803722" cy="1001728"/>
             </a:xfrm>
             <a:prstGeom prst="rect">
               <a:avLst/>
@@ -2472,8 +2472,8 @@
           </p:nvSpPr>
           <p:spPr>
             <a:xfrm>
-              <a:off x="4555086" y="2634495"/>
-              <a:ext cx="1010233" cy="1877757"/>
+              <a:off x="4516650" y="4342381"/>
+              <a:ext cx="803722" cy="1001728"/>
             </a:xfrm>
             <a:prstGeom prst="rect">
               <a:avLst/>
@@ -2507,8 +2507,8 @@
           </p:nvSpPr>
           <p:spPr>
             <a:xfrm>
-              <a:off x="5565319" y="2634495"/>
-              <a:ext cx="1010233" cy="1877757"/>
+              <a:off x="5320372" y="4342381"/>
+              <a:ext cx="803722" cy="1001728"/>
             </a:xfrm>
             <a:prstGeom prst="rect">
               <a:avLst/>
@@ -2542,8 +2542,8 @@
           </p:nvSpPr>
           <p:spPr>
             <a:xfrm>
-              <a:off x="6575553" y="2634495"/>
-              <a:ext cx="1010233" cy="1877757"/>
+              <a:off x="6124095" y="4342381"/>
+              <a:ext cx="803722" cy="1001728"/>
             </a:xfrm>
             <a:prstGeom prst="rect">
               <a:avLst/>
@@ -2577,8 +2577,8 @@
           </p:nvSpPr>
           <p:spPr>
             <a:xfrm>
-              <a:off x="514154" y="4512253"/>
-              <a:ext cx="1010233" cy="1877757"/>
+              <a:off x="1301760" y="3340652"/>
+              <a:ext cx="803722" cy="1001728"/>
             </a:xfrm>
             <a:prstGeom prst="rect">
               <a:avLst/>
@@ -2612,8 +2612,8 @@
           </p:nvSpPr>
           <p:spPr>
             <a:xfrm>
-              <a:off x="1524387" y="4512253"/>
-              <a:ext cx="1010233" cy="1877757"/>
+              <a:off x="2105483" y="3340652"/>
+              <a:ext cx="803722" cy="1001728"/>
             </a:xfrm>
             <a:prstGeom prst="rect">
               <a:avLst/>
@@ -2647,8 +2647,8 @@
           </p:nvSpPr>
           <p:spPr>
             <a:xfrm>
-              <a:off x="2534620" y="4512253"/>
-              <a:ext cx="1010233" cy="1877757"/>
+              <a:off x="2909205" y="3340652"/>
+              <a:ext cx="803722" cy="1001728"/>
             </a:xfrm>
             <a:prstGeom prst="rect">
               <a:avLst/>
@@ -2682,8 +2682,8 @@
           </p:nvSpPr>
           <p:spPr>
             <a:xfrm>
-              <a:off x="3544853" y="4512253"/>
-              <a:ext cx="1010233" cy="1877757"/>
+              <a:off x="3712927" y="3340652"/>
+              <a:ext cx="803722" cy="1001728"/>
             </a:xfrm>
             <a:prstGeom prst="rect">
               <a:avLst/>
@@ -2717,8 +2717,8 @@
           </p:nvSpPr>
           <p:spPr>
             <a:xfrm>
-              <a:off x="4555086" y="4512253"/>
-              <a:ext cx="1010233" cy="1877757"/>
+              <a:off x="4516650" y="3340652"/>
+              <a:ext cx="803722" cy="1001728"/>
             </a:xfrm>
             <a:prstGeom prst="rect">
               <a:avLst/>
@@ -2752,8 +2752,8 @@
           </p:nvSpPr>
           <p:spPr>
             <a:xfrm>
-              <a:off x="5565319" y="4512253"/>
-              <a:ext cx="1010233" cy="1877757"/>
+              <a:off x="5320372" y="3340652"/>
+              <a:ext cx="803722" cy="1001728"/>
             </a:xfrm>
             <a:prstGeom prst="rect">
               <a:avLst/>
@@ -2787,8 +2787,8 @@
           </p:nvSpPr>
           <p:spPr>
             <a:xfrm>
-              <a:off x="6575553" y="4512253"/>
-              <a:ext cx="1010233" cy="1877757"/>
+              <a:off x="6124095" y="3340652"/>
+              <a:ext cx="803722" cy="1001728"/>
             </a:xfrm>
             <a:prstGeom prst="rect">
               <a:avLst/>
@@ -2822,8 +2822,8 @@
           </p:nvSpPr>
           <p:spPr>
             <a:xfrm>
-              <a:off x="514154" y="756738"/>
-              <a:ext cx="1010233" cy="1877757"/>
+              <a:off x="1301760" y="2338924"/>
+              <a:ext cx="803722" cy="1001728"/>
             </a:xfrm>
             <a:prstGeom prst="rect">
               <a:avLst/>
@@ -2857,8 +2857,8 @@
           </p:nvSpPr>
           <p:spPr>
             <a:xfrm>
-              <a:off x="1524387" y="756738"/>
-              <a:ext cx="1010233" cy="1877757"/>
+              <a:off x="2105483" y="2338924"/>
+              <a:ext cx="803722" cy="1001728"/>
             </a:xfrm>
             <a:prstGeom prst="rect">
               <a:avLst/>
@@ -2892,8 +2892,8 @@
           </p:nvSpPr>
           <p:spPr>
             <a:xfrm>
-              <a:off x="2534620" y="756738"/>
-              <a:ext cx="1010233" cy="1877757"/>
+              <a:off x="2909205" y="2338924"/>
+              <a:ext cx="803722" cy="1001728"/>
             </a:xfrm>
             <a:prstGeom prst="rect">
               <a:avLst/>
@@ -2927,8 +2927,8 @@
           </p:nvSpPr>
           <p:spPr>
             <a:xfrm>
-              <a:off x="3544853" y="756738"/>
-              <a:ext cx="1010233" cy="1877757"/>
+              <a:off x="3712927" y="2338924"/>
+              <a:ext cx="803722" cy="1001728"/>
             </a:xfrm>
             <a:prstGeom prst="rect">
               <a:avLst/>
@@ -2962,8 +2962,8 @@
           </p:nvSpPr>
           <p:spPr>
             <a:xfrm>
-              <a:off x="4555086" y="756738"/>
-              <a:ext cx="1010233" cy="1877757"/>
+              <a:off x="4516650" y="2338924"/>
+              <a:ext cx="803722" cy="1001728"/>
             </a:xfrm>
             <a:prstGeom prst="rect">
               <a:avLst/>
@@ -2997,8 +2997,8 @@
           </p:nvSpPr>
           <p:spPr>
             <a:xfrm>
-              <a:off x="5565319" y="756738"/>
-              <a:ext cx="1010233" cy="1877757"/>
+              <a:off x="5320372" y="2338924"/>
+              <a:ext cx="803722" cy="1001728"/>
             </a:xfrm>
             <a:prstGeom prst="rect">
               <a:avLst/>
@@ -3032,8 +3032,8 @@
           </p:nvSpPr>
           <p:spPr>
             <a:xfrm>
-              <a:off x="6575553" y="756738"/>
-              <a:ext cx="1010233" cy="1877757"/>
+              <a:off x="6124095" y="2338924"/>
+              <a:ext cx="803722" cy="1001728"/>
             </a:xfrm>
             <a:prstGeom prst="rect">
               <a:avLst/>
@@ -3067,15 +3067,15 @@
           </p:nvSpPr>
           <p:spPr>
             <a:xfrm>
-              <a:off x="413131" y="568962"/>
-              <a:ext cx="0" cy="6008824"/>
+              <a:off x="1221388" y="2238751"/>
+              <a:ext cx="0" cy="3205531"/>
             </a:xfrm>
             <a:custGeom>
               <a:avLst/>
               <a:pathLst>
-                <a:path w="0" h="6008824">
+                <a:path w="0" h="3205531">
                   <a:moveTo>
-                    <a:pt x="0" y="6008824"/>
+                    <a:pt x="0" y="3205531"/>
                   </a:moveTo>
                   <a:lnTo>
                     <a:pt x="0" y="0"/>
@@ -3107,7 +3107,53 @@
           </p:nvSpPr>
           <p:spPr>
             <a:xfrm>
-              <a:off x="82241" y="5398667"/>
+              <a:off x="890498" y="4790781"/>
+              <a:ext cx="256872" cy="99833"/>
+            </a:xfrm>
+            <a:prstGeom prst="rect">
+              <a:avLst/>
+            </a:prstGeom>
+            <a:noFill/>
+          </p:spPr>
+          <p:txBody>
+            <a:bodyPr lIns="0" rIns="0" tIns="0" bIns="0" anchorCtr="1" anchor="ctr" wrap="none"/>
+            <a:lstStyle/>
+            <a:p>
+              <a:pPr algn="l" marL="0" marR="0" indent="0">
+                <a:lnSpc>
+                  <a:spcPts val="1040"/>
+                </a:lnSpc>
+                <a:spcBef>
+                  <a:spcPts val="0"/>
+                </a:spcBef>
+                <a:spcAft>
+                  <a:spcPts val="0"/>
+                </a:spcAft>
+              </a:pPr>
+              <a:r>
+                <a:rPr sz="1040">
+                  <a:solidFill>
+                    <a:srgbClr val="000000">
+                      <a:alpha val="100000"/>
+                    </a:srgbClr>
+                  </a:solidFill>
+                  <a:latin typeface="Helvetica"/>
+                  <a:cs typeface="Helvetica"/>
+                </a:rPr>
+                <a:t>FG1</a:t>
+              </a:r>
+            </a:p>
+          </p:txBody>
+        </p:sp>
+        <p:sp>
+          <p:nvSpPr>
+            <p:cNvPr id="29" name="tx29"/>
+            <p:cNvSpPr/>
+            <p:nvPr/>
+          </p:nvSpPr>
+          <p:spPr>
+            <a:xfrm>
+              <a:off x="890498" y="3789052"/>
               <a:ext cx="256872" cy="99833"/>
             </a:xfrm>
             <a:prstGeom prst="rect">
@@ -3147,59 +3193,13 @@
         </p:sp>
         <p:sp>
           <p:nvSpPr>
-            <p:cNvPr id="29" name="tx29"/>
-            <p:cNvSpPr/>
-            <p:nvPr/>
-          </p:nvSpPr>
-          <p:spPr>
-            <a:xfrm>
-              <a:off x="82241" y="3520910"/>
-              <a:ext cx="256872" cy="99833"/>
-            </a:xfrm>
-            <a:prstGeom prst="rect">
-              <a:avLst/>
-            </a:prstGeom>
-            <a:noFill/>
-          </p:spPr>
-          <p:txBody>
-            <a:bodyPr lIns="0" rIns="0" tIns="0" bIns="0" anchorCtr="1" anchor="ctr" wrap="none"/>
-            <a:lstStyle/>
-            <a:p>
-              <a:pPr algn="l" marL="0" marR="0" indent="0">
-                <a:lnSpc>
-                  <a:spcPts val="1040"/>
-                </a:lnSpc>
-                <a:spcBef>
-                  <a:spcPts val="0"/>
-                </a:spcBef>
-                <a:spcAft>
-                  <a:spcPts val="0"/>
-                </a:spcAft>
-              </a:pPr>
-              <a:r>
-                <a:rPr sz="1040">
-                  <a:solidFill>
-                    <a:srgbClr val="000000">
-                      <a:alpha val="100000"/>
-                    </a:srgbClr>
-                  </a:solidFill>
-                  <a:latin typeface="Helvetica"/>
-                  <a:cs typeface="Helvetica"/>
-                </a:rPr>
-                <a:t>FG1</a:t>
-              </a:r>
-            </a:p>
-          </p:txBody>
-        </p:sp>
-        <p:sp>
-          <p:nvSpPr>
             <p:cNvPr id="30" name="tx30"/>
             <p:cNvSpPr/>
             <p:nvPr/>
           </p:nvSpPr>
           <p:spPr>
             <a:xfrm>
-              <a:off x="82241" y="1643152"/>
+              <a:off x="890498" y="2787324"/>
               <a:ext cx="256872" cy="99833"/>
             </a:xfrm>
             <a:prstGeom prst="rect">
@@ -3245,7 +3245,7 @@
           </p:nvSpPr>
           <p:spPr>
             <a:xfrm>
-              <a:off x="372010" y="5451132"/>
+              <a:off x="1180267" y="4843245"/>
               <a:ext cx="41120" cy="0"/>
             </a:xfrm>
             <a:custGeom>
@@ -3285,7 +3285,7 @@
           </p:nvSpPr>
           <p:spPr>
             <a:xfrm>
-              <a:off x="372010" y="3573374"/>
+              <a:off x="1180267" y="3841517"/>
               <a:ext cx="41120" cy="0"/>
             </a:xfrm>
             <a:custGeom>
@@ -3325,7 +3325,7 @@
           </p:nvSpPr>
           <p:spPr>
             <a:xfrm>
-              <a:off x="372010" y="1695617"/>
+              <a:off x="1180267" y="2839788"/>
               <a:ext cx="41120" cy="0"/>
             </a:xfrm>
             <a:custGeom>
@@ -3365,18 +3365,18 @@
           </p:nvSpPr>
           <p:spPr>
             <a:xfrm>
-              <a:off x="413131" y="6577786"/>
-              <a:ext cx="7273677" cy="0"/>
+              <a:off x="1221388" y="5444282"/>
+              <a:ext cx="5786801" cy="0"/>
             </a:xfrm>
             <a:custGeom>
               <a:avLst/>
               <a:pathLst>
-                <a:path w="7273677" h="0">
+                <a:path w="5786801" h="0">
                   <a:moveTo>
                     <a:pt x="0" y="0"/>
                   </a:moveTo>
                   <a:lnTo>
-                    <a:pt x="7273677" y="0"/>
+                    <a:pt x="5786801" y="0"/>
                   </a:lnTo>
                 </a:path>
               </a:pathLst>
@@ -3405,7 +3405,7 @@
           </p:nvSpPr>
           <p:spPr>
             <a:xfrm>
-              <a:off x="1019271" y="6577786"/>
+              <a:off x="1703621" y="5444282"/>
               <a:ext cx="0" cy="41120"/>
             </a:xfrm>
             <a:custGeom>
@@ -3445,7 +3445,7 @@
           </p:nvSpPr>
           <p:spPr>
             <a:xfrm>
-              <a:off x="2029504" y="6577786"/>
+              <a:off x="2507344" y="5444282"/>
               <a:ext cx="0" cy="41120"/>
             </a:xfrm>
             <a:custGeom>
@@ -3485,7 +3485,7 @@
           </p:nvSpPr>
           <p:spPr>
             <a:xfrm>
-              <a:off x="3039737" y="6577786"/>
+              <a:off x="3311066" y="5444282"/>
               <a:ext cx="0" cy="41120"/>
             </a:xfrm>
             <a:custGeom>
@@ -3525,7 +3525,7 @@
           </p:nvSpPr>
           <p:spPr>
             <a:xfrm>
-              <a:off x="4049970" y="6577786"/>
+              <a:off x="4114789" y="5444282"/>
               <a:ext cx="0" cy="41120"/>
             </a:xfrm>
             <a:custGeom>
@@ -3565,7 +3565,7 @@
           </p:nvSpPr>
           <p:spPr>
             <a:xfrm>
-              <a:off x="5060203" y="6577786"/>
+              <a:off x="4918511" y="5444282"/>
               <a:ext cx="0" cy="41120"/>
             </a:xfrm>
             <a:custGeom>
@@ -3605,7 +3605,7 @@
           </p:nvSpPr>
           <p:spPr>
             <a:xfrm>
-              <a:off x="6070436" y="6577786"/>
+              <a:off x="5722233" y="5444282"/>
               <a:ext cx="0" cy="41120"/>
             </a:xfrm>
             <a:custGeom>
@@ -3645,7 +3645,7 @@
           </p:nvSpPr>
           <p:spPr>
             <a:xfrm>
-              <a:off x="7080669" y="6577786"/>
+              <a:off x="6525956" y="5444282"/>
               <a:ext cx="0" cy="41120"/>
             </a:xfrm>
             <a:custGeom>
@@ -3685,7 +3685,7 @@
           </p:nvSpPr>
           <p:spPr>
             <a:xfrm>
-              <a:off x="927531" y="6646451"/>
+              <a:off x="1611881" y="5512947"/>
               <a:ext cx="183480" cy="100091"/>
             </a:xfrm>
             <a:prstGeom prst="rect">
@@ -3731,7 +3731,7 @@
           </p:nvSpPr>
           <p:spPr>
             <a:xfrm>
-              <a:off x="1937764" y="6651804"/>
+              <a:off x="2415604" y="5518300"/>
               <a:ext cx="183480" cy="94739"/>
             </a:xfrm>
             <a:prstGeom prst="rect">
@@ -3777,7 +3777,7 @@
           </p:nvSpPr>
           <p:spPr>
             <a:xfrm>
-              <a:off x="2951705" y="6651804"/>
+              <a:off x="3223034" y="5518300"/>
               <a:ext cx="176063" cy="94739"/>
             </a:xfrm>
             <a:prstGeom prst="rect">
@@ -3823,7 +3823,7 @@
           </p:nvSpPr>
           <p:spPr>
             <a:xfrm>
-              <a:off x="3921598" y="6651804"/>
+              <a:off x="3986417" y="5518300"/>
               <a:ext cx="256743" cy="94739"/>
             </a:xfrm>
             <a:prstGeom prst="rect">
@@ -3869,7 +3869,7 @@
           </p:nvSpPr>
           <p:spPr>
             <a:xfrm>
-              <a:off x="4972107" y="6646709"/>
+              <a:off x="4830415" y="5513205"/>
               <a:ext cx="176192" cy="99833"/>
             </a:xfrm>
             <a:prstGeom prst="rect">
@@ -3915,7 +3915,7 @@
           </p:nvSpPr>
           <p:spPr>
             <a:xfrm>
-              <a:off x="5978696" y="6646451"/>
+              <a:off x="5630493" y="5512947"/>
               <a:ext cx="183480" cy="100091"/>
             </a:xfrm>
             <a:prstGeom prst="rect">
@@ -3961,7 +3961,7 @@
           </p:nvSpPr>
           <p:spPr>
             <a:xfrm>
-              <a:off x="6981609" y="6651804"/>
+              <a:off x="6426896" y="5518300"/>
               <a:ext cx="198120" cy="94739"/>
             </a:xfrm>
             <a:prstGeom prst="rect">
@@ -4001,13 +4001,105 @@
         </p:sp>
         <p:sp>
           <p:nvSpPr>
-            <p:cNvPr id="49" name="rc49"/>
-            <p:cNvSpPr/>
-            <p:nvPr/>
-          </p:nvSpPr>
-          <p:spPr>
-            <a:xfrm>
-              <a:off x="7851292" y="2823699"/>
+            <p:cNvPr id="49" name="tx49"/>
+            <p:cNvSpPr/>
+            <p:nvPr/>
+          </p:nvSpPr>
+          <p:spPr>
+            <a:xfrm>
+              <a:off x="3949689" y="5740572"/>
+              <a:ext cx="330200" cy="121325"/>
+            </a:xfrm>
+            <a:prstGeom prst="rect">
+              <a:avLst/>
+            </a:prstGeom>
+            <a:noFill/>
+          </p:spPr>
+          <p:txBody>
+            <a:bodyPr lIns="0" rIns="0" tIns="0" bIns="0" anchorCtr="1" anchor="ctr" wrap="none"/>
+            <a:lstStyle/>
+            <a:p>
+              <a:pPr algn="l" marL="0" marR="0" indent="0">
+                <a:lnSpc>
+                  <a:spcPts val="1300"/>
+                </a:lnSpc>
+                <a:spcBef>
+                  <a:spcPts val="0"/>
+                </a:spcBef>
+                <a:spcAft>
+                  <a:spcPts val="0"/>
+                </a:spcAft>
+              </a:pPr>
+              <a:r>
+                <a:rPr sz="1300">
+                  <a:solidFill>
+                    <a:srgbClr val="000000">
+                      <a:alpha val="100000"/>
+                    </a:srgbClr>
+                  </a:solidFill>
+                  <a:latin typeface="Helvetica"/>
+                  <a:cs typeface="Helvetica"/>
+                </a:rPr>
+                <a:t>Trait</a:t>
+              </a:r>
+            </a:p>
+          </p:txBody>
+        </p:sp>
+        <p:sp>
+          <p:nvSpPr>
+            <p:cNvPr id="50" name="tx50"/>
+            <p:cNvSpPr/>
+            <p:nvPr/>
+          </p:nvSpPr>
+          <p:spPr>
+            <a:xfrm rot="-5400000">
+              <a:off x="575728" y="3779120"/>
+              <a:ext cx="229269" cy="124792"/>
+            </a:xfrm>
+            <a:prstGeom prst="rect">
+              <a:avLst/>
+            </a:prstGeom>
+            <a:noFill/>
+          </p:spPr>
+          <p:txBody>
+            <a:bodyPr lIns="0" rIns="0" tIns="0" bIns="0" anchorCtr="1" anchor="ctr" wrap="none"/>
+            <a:lstStyle/>
+            <a:p>
+              <a:pPr algn="l" marL="0" marR="0" indent="0">
+                <a:lnSpc>
+                  <a:spcPts val="1300"/>
+                </a:lnSpc>
+                <a:spcBef>
+                  <a:spcPts val="0"/>
+                </a:spcBef>
+                <a:spcAft>
+                  <a:spcPts val="0"/>
+                </a:spcAft>
+              </a:pPr>
+              <a:r>
+                <a:rPr sz="1300">
+                  <a:solidFill>
+                    <a:srgbClr val="000000">
+                      <a:alpha val="100000"/>
+                    </a:srgbClr>
+                  </a:solidFill>
+                  <a:latin typeface="Helvetica"/>
+                  <a:cs typeface="Helvetica"/>
+                </a:rPr>
+                <a:t>FG</a:t>
+              </a:r>
+            </a:p>
+          </p:txBody>
+        </p:sp>
+        <p:sp>
+          <p:nvSpPr>
+            <p:cNvPr id="51" name="rc51"/>
+            <p:cNvSpPr/>
+            <p:nvPr/>
+          </p:nvSpPr>
+          <p:spPr>
+            <a:xfrm>
+              <a:off x="7172672" y="3091841"/>
               <a:ext cx="1210465" cy="1499350"/>
             </a:xfrm>
             <a:prstGeom prst="rect">
@@ -4027,13 +4119,13 @@
         </p:sp>
         <p:sp>
           <p:nvSpPr>
-            <p:cNvPr id="50" name="tx50"/>
-            <p:cNvSpPr/>
-            <p:nvPr/>
-          </p:nvSpPr>
-          <p:spPr>
-            <a:xfrm>
-              <a:off x="7933534" y="2921137"/>
+            <p:cNvPr id="52" name="tx52"/>
+            <p:cNvSpPr/>
+            <p:nvPr/>
+          </p:nvSpPr>
+          <p:spPr>
+            <a:xfrm>
+              <a:off x="7254914" y="3189279"/>
               <a:ext cx="1045982" cy="121890"/>
             </a:xfrm>
             <a:prstGeom prst="rect">
@@ -4073,7 +4165,7 @@
         </p:sp>
         <p:pic>
           <p:nvPicPr>
-            <p:cNvPr id="51" name="pic51"/>
+            <p:cNvPr id="53" name="pic53"/>
             <p:cNvPicPr/>
             <p:nvPr/>
           </p:nvPicPr>
@@ -4085,7 +4177,7 @@
           </p:blipFill>
           <p:spPr>
             <a:xfrm>
-              <a:off x="7933534" y="3143528"/>
+              <a:off x="7254914" y="3411670"/>
               <a:ext cx="219455" cy="1097280"/>
             </a:xfrm>
             <a:prstGeom prst="rect">
@@ -4095,13 +4187,13 @@
         </p:pic>
         <p:sp>
           <p:nvSpPr>
-            <p:cNvPr id="52" name="pl52"/>
-            <p:cNvSpPr/>
-            <p:nvPr/>
-          </p:nvSpPr>
-          <p:spPr>
-            <a:xfrm>
-              <a:off x="8109098" y="4170693"/>
+            <p:cNvPr id="54" name="pl54"/>
+            <p:cNvSpPr/>
+            <p:nvPr/>
+          </p:nvSpPr>
+          <p:spPr>
+            <a:xfrm>
+              <a:off x="7430479" y="4438835"/>
               <a:ext cx="43891" cy="0"/>
             </a:xfrm>
             <a:custGeom>
@@ -4135,13 +4227,13 @@
         </p:sp>
         <p:sp>
           <p:nvSpPr>
-            <p:cNvPr id="53" name="pl53"/>
-            <p:cNvSpPr/>
-            <p:nvPr/>
-          </p:nvSpPr>
-          <p:spPr>
-            <a:xfrm>
-              <a:off x="8109098" y="3896502"/>
+            <p:cNvPr id="55" name="pl55"/>
+            <p:cNvSpPr/>
+            <p:nvPr/>
+          </p:nvSpPr>
+          <p:spPr>
+            <a:xfrm>
+              <a:off x="7430479" y="4164645"/>
               <a:ext cx="43891" cy="0"/>
             </a:xfrm>
             <a:custGeom>
@@ -4175,13 +4267,13 @@
         </p:sp>
         <p:sp>
           <p:nvSpPr>
-            <p:cNvPr id="54" name="pl54"/>
-            <p:cNvSpPr/>
-            <p:nvPr/>
-          </p:nvSpPr>
-          <p:spPr>
-            <a:xfrm>
-              <a:off x="8109098" y="3622312"/>
+            <p:cNvPr id="56" name="pl56"/>
+            <p:cNvSpPr/>
+            <p:nvPr/>
+          </p:nvSpPr>
+          <p:spPr>
+            <a:xfrm>
+              <a:off x="7430479" y="3890454"/>
               <a:ext cx="43891" cy="0"/>
             </a:xfrm>
             <a:custGeom>
@@ -4215,13 +4307,13 @@
         </p:sp>
         <p:sp>
           <p:nvSpPr>
-            <p:cNvPr id="55" name="pl55"/>
-            <p:cNvSpPr/>
-            <p:nvPr/>
-          </p:nvSpPr>
-          <p:spPr>
-            <a:xfrm>
-              <a:off x="8109098" y="3348121"/>
+            <p:cNvPr id="57" name="pl57"/>
+            <p:cNvSpPr/>
+            <p:nvPr/>
+          </p:nvSpPr>
+          <p:spPr>
+            <a:xfrm>
+              <a:off x="7430479" y="3616263"/>
               <a:ext cx="43891" cy="0"/>
             </a:xfrm>
             <a:custGeom>
@@ -4255,13 +4347,13 @@
         </p:sp>
         <p:sp>
           <p:nvSpPr>
-            <p:cNvPr id="56" name="pl56"/>
-            <p:cNvSpPr/>
-            <p:nvPr/>
-          </p:nvSpPr>
-          <p:spPr>
-            <a:xfrm>
-              <a:off x="7933534" y="4170693"/>
+            <p:cNvPr id="58" name="pl58"/>
+            <p:cNvSpPr/>
+            <p:nvPr/>
+          </p:nvSpPr>
+          <p:spPr>
+            <a:xfrm>
+              <a:off x="7254914" y="4438835"/>
               <a:ext cx="43891" cy="0"/>
             </a:xfrm>
             <a:custGeom>
@@ -4295,13 +4387,13 @@
         </p:sp>
         <p:sp>
           <p:nvSpPr>
-            <p:cNvPr id="57" name="pl57"/>
-            <p:cNvSpPr/>
-            <p:nvPr/>
-          </p:nvSpPr>
-          <p:spPr>
-            <a:xfrm>
-              <a:off x="7933534" y="3896502"/>
+            <p:cNvPr id="59" name="pl59"/>
+            <p:cNvSpPr/>
+            <p:nvPr/>
+          </p:nvSpPr>
+          <p:spPr>
+            <a:xfrm>
+              <a:off x="7254914" y="4164645"/>
               <a:ext cx="43891" cy="0"/>
             </a:xfrm>
             <a:custGeom>
@@ -4335,13 +4427,13 @@
         </p:sp>
         <p:sp>
           <p:nvSpPr>
-            <p:cNvPr id="58" name="pl58"/>
-            <p:cNvSpPr/>
-            <p:nvPr/>
-          </p:nvSpPr>
-          <p:spPr>
-            <a:xfrm>
-              <a:off x="7933534" y="3622312"/>
+            <p:cNvPr id="60" name="pl60"/>
+            <p:cNvSpPr/>
+            <p:nvPr/>
+          </p:nvSpPr>
+          <p:spPr>
+            <a:xfrm>
+              <a:off x="7254914" y="3890454"/>
               <a:ext cx="43891" cy="0"/>
             </a:xfrm>
             <a:custGeom>
@@ -4375,13 +4467,13 @@
         </p:sp>
         <p:sp>
           <p:nvSpPr>
-            <p:cNvPr id="59" name="pl59"/>
-            <p:cNvSpPr/>
-            <p:nvPr/>
-          </p:nvSpPr>
-          <p:spPr>
-            <a:xfrm>
-              <a:off x="7933534" y="3348121"/>
+            <p:cNvPr id="61" name="pl61"/>
+            <p:cNvSpPr/>
+            <p:nvPr/>
+          </p:nvSpPr>
+          <p:spPr>
+            <a:xfrm>
+              <a:off x="7254914" y="3616263"/>
               <a:ext cx="43891" cy="0"/>
             </a:xfrm>
             <a:custGeom>
@@ -4415,13 +4507,13 @@
         </p:sp>
         <p:sp>
           <p:nvSpPr>
-            <p:cNvPr id="60" name="tx60"/>
-            <p:cNvSpPr/>
-            <p:nvPr/>
-          </p:nvSpPr>
-          <p:spPr>
-            <a:xfrm>
-              <a:off x="8235231" y="4123194"/>
+            <p:cNvPr id="62" name="tx62"/>
+            <p:cNvSpPr/>
+            <p:nvPr/>
+          </p:nvSpPr>
+          <p:spPr>
+            <a:xfrm>
+              <a:off x="7556612" y="4391337"/>
               <a:ext cx="227592" cy="94868"/>
             </a:xfrm>
             <a:prstGeom prst="rect">
@@ -4461,13 +4553,13 @@
         </p:sp>
         <p:sp>
           <p:nvSpPr>
-            <p:cNvPr id="61" name="tx61"/>
-            <p:cNvSpPr/>
-            <p:nvPr/>
-          </p:nvSpPr>
-          <p:spPr>
-            <a:xfrm>
-              <a:off x="8235231" y="3849004"/>
+            <p:cNvPr id="63" name="tx63"/>
+            <p:cNvSpPr/>
+            <p:nvPr/>
+          </p:nvSpPr>
+          <p:spPr>
+            <a:xfrm>
+              <a:off x="7556612" y="4117146"/>
               <a:ext cx="183609" cy="94868"/>
             </a:xfrm>
             <a:prstGeom prst="rect">
@@ -4507,13 +4599,13 @@
         </p:sp>
         <p:sp>
           <p:nvSpPr>
-            <p:cNvPr id="62" name="tx62"/>
-            <p:cNvSpPr/>
-            <p:nvPr/>
-          </p:nvSpPr>
-          <p:spPr>
-            <a:xfrm>
-              <a:off x="8235231" y="3574813"/>
+            <p:cNvPr id="64" name="tx64"/>
+            <p:cNvSpPr/>
+            <p:nvPr/>
+          </p:nvSpPr>
+          <p:spPr>
+            <a:xfrm>
+              <a:off x="7556612" y="3842955"/>
               <a:ext cx="183609" cy="94868"/>
             </a:xfrm>
             <a:prstGeom prst="rect">
@@ -4553,13 +4645,13 @@
         </p:sp>
         <p:sp>
           <p:nvSpPr>
-            <p:cNvPr id="63" name="tx63"/>
-            <p:cNvSpPr/>
-            <p:nvPr/>
-          </p:nvSpPr>
-          <p:spPr>
-            <a:xfrm>
-              <a:off x="8235231" y="3300622"/>
+            <p:cNvPr id="65" name="tx65"/>
+            <p:cNvSpPr/>
+            <p:nvPr/>
+          </p:nvSpPr>
+          <p:spPr>
+            <a:xfrm>
+              <a:off x="7556612" y="3568765"/>
               <a:ext cx="183609" cy="94868"/>
             </a:xfrm>
             <a:prstGeom prst="rect">
@@ -4599,13 +4691,13 @@
         </p:sp>
         <p:sp>
           <p:nvSpPr>
-            <p:cNvPr id="64" name="tx64"/>
-            <p:cNvSpPr/>
-            <p:nvPr/>
-          </p:nvSpPr>
-          <p:spPr>
-            <a:xfrm>
-              <a:off x="413131" y="295420"/>
+            <p:cNvPr id="66" name="tx66"/>
+            <p:cNvSpPr/>
+            <p:nvPr/>
+          </p:nvSpPr>
+          <p:spPr>
+            <a:xfrm>
+              <a:off x="1221388" y="1965209"/>
               <a:ext cx="6047513" cy="154781"/>
             </a:xfrm>
             <a:prstGeom prst="rect">
@@ -4645,13 +4737,13 @@
         </p:sp>
         <p:sp>
           <p:nvSpPr>
-            <p:cNvPr id="65" name="tx65"/>
-            <p:cNvSpPr/>
-            <p:nvPr/>
-          </p:nvSpPr>
-          <p:spPr>
-            <a:xfrm>
-              <a:off x="413131" y="42740"/>
+            <p:cNvPr id="67" name="tx67"/>
+            <p:cNvSpPr/>
+            <p:nvPr/>
+          </p:nvSpPr>
+          <p:spPr>
+            <a:xfrm>
+              <a:off x="1221388" y="1712529"/>
               <a:ext cx="4248447" cy="167468"/>
             </a:xfrm>
             <a:prstGeom prst="rect">
